--- a/templates/weekly-readers.pptx
+++ b/templates/weekly-readers.pptx
@@ -13,6 +13,7 @@
     <p:sldId id="2147483646" r:id="rId14"/>
     <p:sldId id="271" r:id="rId19"/>
     <p:sldId id="2147483647" r:id="rId99"/>
+    <p:sldId id="262" r:id="rId106"/>
     <p:sldId id="256" r:id="rId100"/>
     <p:sldId id="257" r:id="rId101"/>
     <p:sldId id="258" r:id="rId102"/>
@@ -12811,6 +12812,507 @@
 </p:sld>
 </file>
 
+<file path=ppt/slides/slide70.xml><?xml version="1.0" encoding="utf-8"?>
+<p:sld xmlns:a="http://schemas.openxmlformats.org/drawingml/2006/main" xmlns:r="http://schemas.openxmlformats.org/officeDocument/2006/relationships" xmlns:p="http://schemas.openxmlformats.org/presentationml/2006/main">
+  <p:cSld>
+    <p:spTree>
+      <p:nvGrpSpPr>
+        <p:cNvPr id="1" name="">
+          <a:extLst>
+            <a:ext uri="{FF2B5EF4-FFF2-40B4-BE49-F238E27FC236}">
+              <a16:creationId xmlns:a16="http://schemas.microsoft.com/office/drawing/2014/main" id="{2D6377FE-1F60-CAAD-C235-D744A796AE17}"/>
+            </a:ext>
+          </a:extLst>
+        </p:cNvPr>
+        <p:cNvGrpSpPr/>
+        <p:nvPr/>
+      </p:nvGrpSpPr>
+      <p:grpSpPr>
+        <a:xfrm>
+          <a:off x="0" y="0"/>
+          <a:ext cx="0" cy="0"/>
+          <a:chOff x="0" y="0"/>
+          <a:chExt cx="0" cy="0"/>
+        </a:xfrm>
+      </p:grpSpPr>
+      <p:grpSp>
+        <p:nvGrpSpPr>
+          <p:cNvPr id="9" name="Graphic 5">
+            <a:extLst>
+              <a:ext uri="{FF2B5EF4-FFF2-40B4-BE49-F238E27FC236}">
+                <a16:creationId xmlns:a16="http://schemas.microsoft.com/office/drawing/2014/main" id="{9B22F60B-64F0-784E-5C3A-88436046C2E1}"/>
+              </a:ext>
+            </a:extLst>
+          </p:cNvPr>
+          <p:cNvGrpSpPr/>
+          <p:nvPr/>
+        </p:nvGrpSpPr>
+        <p:grpSpPr>
+          <a:xfrm>
+            <a:off x="17137438" y="768731"/>
+            <a:ext cx="458970" cy="321364"/>
+            <a:chOff x="1104276" y="880458"/>
+            <a:chExt cx="217490" cy="167511"/>
+          </a:xfrm>
+          <a:solidFill>
+            <a:srgbClr val="A95427">
+              <a:alpha val="16000"/>
+            </a:srgbClr>
+          </a:solidFill>
+        </p:grpSpPr>
+        <p:sp>
+          <p:nvSpPr>
+            <p:cNvPr id="10" name="Freeform 9">
+              <a:extLst>
+                <a:ext uri="{FF2B5EF4-FFF2-40B4-BE49-F238E27FC236}">
+                  <a16:creationId xmlns:a16="http://schemas.microsoft.com/office/drawing/2014/main" id="{02761AEC-53F5-115D-F425-E27D5C5935CB}"/>
+                </a:ext>
+              </a:extLst>
+            </p:cNvPr>
+            <p:cNvSpPr/>
+            <p:nvPr/>
+          </p:nvSpPr>
+          <p:spPr>
+            <a:xfrm rot="16200000">
+              <a:off x="1139729" y="865933"/>
+              <a:ext cx="167511" cy="196562"/>
+            </a:xfrm>
+            <a:custGeom>
+              <a:avLst/>
+              <a:gdLst>
+                <a:gd name="csX0" fmla="*/ 36533 w 167511"/>
+                <a:gd name="csY0" fmla="*/ 90743 h 196562"/>
+                <a:gd name="csX1" fmla="*/ 83756 w 167511"/>
+                <a:gd name="csY1" fmla="*/ 0 h 196562"/>
+                <a:gd name="csX2" fmla="*/ 130979 w 167511"/>
+                <a:gd name="csY2" fmla="*/ 90743 h 196562"/>
+                <a:gd name="csX3" fmla="*/ 167512 w 167511"/>
+                <a:gd name="csY3" fmla="*/ 130810 h 196562"/>
+                <a:gd name="csX4" fmla="*/ 158467 w 167511"/>
+                <a:gd name="csY4" fmla="*/ 134231 h 196562"/>
+                <a:gd name="csX5" fmla="*/ 83756 w 167511"/>
+                <a:gd name="csY5" fmla="*/ 196562 h 196562"/>
+                <a:gd name="csX6" fmla="*/ 9045 w 167511"/>
+                <a:gd name="csY6" fmla="*/ 134231 h 196562"/>
+                <a:gd name="csX7" fmla="*/ 0 w 167511"/>
+                <a:gd name="csY7" fmla="*/ 130810 h 196562"/>
+                <a:gd name="csX8" fmla="*/ 36533 w 167511"/>
+                <a:gd name="csY8" fmla="*/ 90743 h 196562"/>
+              </a:gdLst>
+              <a:ahLst/>
+              <a:cxnLst>
+                <a:cxn ang="0">
+                  <a:pos x="csX0" y="csY0"/>
+                </a:cxn>
+                <a:cxn ang="0">
+                  <a:pos x="csX1" y="csY1"/>
+                </a:cxn>
+                <a:cxn ang="0">
+                  <a:pos x="csX2" y="csY2"/>
+                </a:cxn>
+                <a:cxn ang="0">
+                  <a:pos x="csX3" y="csY3"/>
+                </a:cxn>
+                <a:cxn ang="0">
+                  <a:pos x="csX4" y="csY4"/>
+                </a:cxn>
+                <a:cxn ang="0">
+                  <a:pos x="csX5" y="csY5"/>
+                </a:cxn>
+                <a:cxn ang="0">
+                  <a:pos x="csX6" y="csY6"/>
+                </a:cxn>
+                <a:cxn ang="0">
+                  <a:pos x="csX7" y="csY7"/>
+                </a:cxn>
+                <a:cxn ang="0">
+                  <a:pos x="csX8" y="csY8"/>
+                </a:cxn>
+              </a:cxnLst>
+              <a:rect l="l" t="t" r="r" b="b"/>
+              <a:pathLst>
+                <a:path w="167511" h="196562">
+                  <a:moveTo>
+                    <a:pt x="36533" y="90743"/>
+                  </a:moveTo>
+                  <a:cubicBezTo>
+                    <a:pt x="62846" y="58505"/>
+                    <a:pt x="78294" y="28354"/>
+                    <a:pt x="83756" y="0"/>
+                  </a:cubicBezTo>
+                  <a:cubicBezTo>
+                    <a:pt x="89218" y="28354"/>
+                    <a:pt x="104666" y="58447"/>
+                    <a:pt x="130979" y="90743"/>
+                  </a:cubicBezTo>
+                  <a:cubicBezTo>
+                    <a:pt x="142961" y="105471"/>
+                    <a:pt x="155354" y="118575"/>
+                    <a:pt x="167512" y="130810"/>
+                  </a:cubicBezTo>
+                  <a:cubicBezTo>
+                    <a:pt x="164458" y="131853"/>
+                    <a:pt x="161462" y="133013"/>
+                    <a:pt x="158467" y="134231"/>
+                  </a:cubicBezTo>
+                  <a:cubicBezTo>
+                    <a:pt x="130450" y="145943"/>
+                    <a:pt x="105488" y="166585"/>
+                    <a:pt x="83756" y="196562"/>
+                  </a:cubicBezTo>
+                  <a:cubicBezTo>
+                    <a:pt x="62024" y="166585"/>
+                    <a:pt x="37062" y="145943"/>
+                    <a:pt x="9045" y="134231"/>
+                  </a:cubicBezTo>
+                  <a:cubicBezTo>
+                    <a:pt x="6050" y="132955"/>
+                    <a:pt x="2995" y="131853"/>
+                    <a:pt x="0" y="130810"/>
+                  </a:cubicBezTo>
+                  <a:cubicBezTo>
+                    <a:pt x="12158" y="118575"/>
+                    <a:pt x="24551" y="105471"/>
+                    <a:pt x="36533" y="90743"/>
+                  </a:cubicBezTo>
+                </a:path>
+              </a:pathLst>
+            </a:custGeom>
+            <a:grpFill/>
+            <a:ln w="6350" cap="flat">
+              <a:noFill/>
+              <a:prstDash val="solid"/>
+              <a:miter/>
+            </a:ln>
+          </p:spPr>
+          <p:txBody>
+            <a:bodyPr/>
+            <a:lstStyle/>
+            <a:p>
+              <a:pPr marL="0" marR="0" lvl="0" indent="0" algn="r" defTabSz="1371669" rtl="1" eaLnBrk="1" fontAlgn="auto" latinLnBrk="0" hangingPunct="1">
+                <a:lnSpc>
+                  <a:spcPct val="100000"/>
+                </a:lnSpc>
+                <a:spcBef>
+                  <a:spcPts val="0"/>
+                </a:spcBef>
+                <a:spcAft>
+                  <a:spcPts val="0"/>
+                </a:spcAft>
+                <a:buClrTx/>
+                <a:buSzTx/>
+                <a:buFontTx/>
+                <a:buNone/>
+                <a:tabLst/>
+                <a:defRPr/>
+              </a:pPr>
+              <a:endParaRPr kumimoji="0" lang="en-SA" sz="2700" b="0" i="0" u="none" strike="noStrike" kern="1200" cap="none" spc="0" normalizeH="0" baseline="0" noProof="0">
+                <a:ln>
+                  <a:noFill/>
+                </a:ln>
+                <a:solidFill>
+                  <a:srgbClr val="163E35"/>
+                </a:solidFill>
+                <a:effectLst/>
+                <a:uLnTx/>
+                <a:uFillTx/>
+                <a:latin typeface="Abar Mid" panose="020B0604020202020204" charset="-78"/>
+                <a:ea typeface="Abar Mid" panose="020B0604020202020204" charset="-78"/>
+                <a:cs typeface="Abar Mid" panose="020B0604020202020204" charset="-78"/>
+              </a:endParaRPr>
+            </a:p>
+          </p:txBody>
+        </p:sp>
+        <p:sp>
+          <p:nvSpPr>
+            <p:cNvPr id="11" name="Freeform 10">
+              <a:extLst>
+                <a:ext uri="{FF2B5EF4-FFF2-40B4-BE49-F238E27FC236}">
+                  <a16:creationId xmlns:a16="http://schemas.microsoft.com/office/drawing/2014/main" id="{D355A17C-D6CA-C28E-91B6-6E1233C42E6E}"/>
+                </a:ext>
+              </a:extLst>
+            </p:cNvPr>
+            <p:cNvSpPr/>
+            <p:nvPr/>
+          </p:nvSpPr>
+          <p:spPr>
+            <a:xfrm rot="16200000">
+              <a:off x="1116280" y="882990"/>
+              <a:ext cx="138439" cy="162448"/>
+            </a:xfrm>
+            <a:custGeom>
+              <a:avLst/>
+              <a:gdLst>
+                <a:gd name="csX0" fmla="*/ 36533 w 167511"/>
+                <a:gd name="csY0" fmla="*/ 90743 h 196562"/>
+                <a:gd name="csX1" fmla="*/ 83756 w 167511"/>
+                <a:gd name="csY1" fmla="*/ 0 h 196562"/>
+                <a:gd name="csX2" fmla="*/ 130979 w 167511"/>
+                <a:gd name="csY2" fmla="*/ 90743 h 196562"/>
+                <a:gd name="csX3" fmla="*/ 167512 w 167511"/>
+                <a:gd name="csY3" fmla="*/ 130810 h 196562"/>
+                <a:gd name="csX4" fmla="*/ 158467 w 167511"/>
+                <a:gd name="csY4" fmla="*/ 134231 h 196562"/>
+                <a:gd name="csX5" fmla="*/ 83756 w 167511"/>
+                <a:gd name="csY5" fmla="*/ 196562 h 196562"/>
+                <a:gd name="csX6" fmla="*/ 9045 w 167511"/>
+                <a:gd name="csY6" fmla="*/ 134231 h 196562"/>
+                <a:gd name="csX7" fmla="*/ 0 w 167511"/>
+                <a:gd name="csY7" fmla="*/ 130810 h 196562"/>
+                <a:gd name="csX8" fmla="*/ 36592 w 167511"/>
+                <a:gd name="csY8" fmla="*/ 90743 h 196562"/>
+              </a:gdLst>
+              <a:ahLst/>
+              <a:cxnLst>
+                <a:cxn ang="0">
+                  <a:pos x="csX0" y="csY0"/>
+                </a:cxn>
+                <a:cxn ang="0">
+                  <a:pos x="csX1" y="csY1"/>
+                </a:cxn>
+                <a:cxn ang="0">
+                  <a:pos x="csX2" y="csY2"/>
+                </a:cxn>
+                <a:cxn ang="0">
+                  <a:pos x="csX3" y="csY3"/>
+                </a:cxn>
+                <a:cxn ang="0">
+                  <a:pos x="csX4" y="csY4"/>
+                </a:cxn>
+                <a:cxn ang="0">
+                  <a:pos x="csX5" y="csY5"/>
+                </a:cxn>
+                <a:cxn ang="0">
+                  <a:pos x="csX6" y="csY6"/>
+                </a:cxn>
+                <a:cxn ang="0">
+                  <a:pos x="csX7" y="csY7"/>
+                </a:cxn>
+                <a:cxn ang="0">
+                  <a:pos x="csX8" y="csY8"/>
+                </a:cxn>
+              </a:cxnLst>
+              <a:rect l="l" t="t" r="r" b="b"/>
+              <a:pathLst>
+                <a:path w="167511" h="196562">
+                  <a:moveTo>
+                    <a:pt x="36533" y="90743"/>
+                  </a:moveTo>
+                  <a:cubicBezTo>
+                    <a:pt x="62846" y="58505"/>
+                    <a:pt x="78294" y="28354"/>
+                    <a:pt x="83756" y="0"/>
+                  </a:cubicBezTo>
+                  <a:cubicBezTo>
+                    <a:pt x="89218" y="28354"/>
+                    <a:pt x="104666" y="58447"/>
+                    <a:pt x="130979" y="90743"/>
+                  </a:cubicBezTo>
+                  <a:cubicBezTo>
+                    <a:pt x="142961" y="105471"/>
+                    <a:pt x="155354" y="118575"/>
+                    <a:pt x="167512" y="130810"/>
+                  </a:cubicBezTo>
+                  <a:cubicBezTo>
+                    <a:pt x="164458" y="131853"/>
+                    <a:pt x="161462" y="133013"/>
+                    <a:pt x="158467" y="134231"/>
+                  </a:cubicBezTo>
+                  <a:cubicBezTo>
+                    <a:pt x="130450" y="145943"/>
+                    <a:pt x="105488" y="166585"/>
+                    <a:pt x="83756" y="196562"/>
+                  </a:cubicBezTo>
+                  <a:cubicBezTo>
+                    <a:pt x="62024" y="166585"/>
+                    <a:pt x="37062" y="145943"/>
+                    <a:pt x="9045" y="134231"/>
+                  </a:cubicBezTo>
+                  <a:cubicBezTo>
+                    <a:pt x="6050" y="132955"/>
+                    <a:pt x="3054" y="131853"/>
+                    <a:pt x="0" y="130810"/>
+                  </a:cubicBezTo>
+                  <a:cubicBezTo>
+                    <a:pt x="12158" y="118575"/>
+                    <a:pt x="24551" y="105471"/>
+                    <a:pt x="36592" y="90743"/>
+                  </a:cubicBezTo>
+                </a:path>
+              </a:pathLst>
+            </a:custGeom>
+            <a:grpFill/>
+            <a:ln w="6350" cap="flat">
+              <a:noFill/>
+              <a:prstDash val="solid"/>
+              <a:miter/>
+            </a:ln>
+          </p:spPr>
+          <p:txBody>
+            <a:bodyPr/>
+            <a:lstStyle/>
+            <a:p>
+              <a:pPr marL="0" marR="0" lvl="0" indent="0" algn="r" defTabSz="1371669" rtl="1" eaLnBrk="1" fontAlgn="auto" latinLnBrk="0" hangingPunct="1">
+                <a:lnSpc>
+                  <a:spcPct val="100000"/>
+                </a:lnSpc>
+                <a:spcBef>
+                  <a:spcPts val="0"/>
+                </a:spcBef>
+                <a:spcAft>
+                  <a:spcPts val="0"/>
+                </a:spcAft>
+                <a:buClrTx/>
+                <a:buSzTx/>
+                <a:buFontTx/>
+                <a:buNone/>
+                <a:tabLst/>
+                <a:defRPr/>
+              </a:pPr>
+              <a:endParaRPr kumimoji="0" lang="en-SA" sz="2700" b="0" i="0" u="none" strike="noStrike" kern="1200" cap="none" spc="0" normalizeH="0" baseline="0" noProof="0">
+                <a:ln>
+                  <a:noFill/>
+                </a:ln>
+                <a:solidFill>
+                  <a:srgbClr val="163E35"/>
+                </a:solidFill>
+                <a:effectLst/>
+                <a:uLnTx/>
+                <a:uFillTx/>
+                <a:latin typeface="Abar Mid" panose="020B0604020202020204" charset="-78"/>
+                <a:ea typeface="Abar Mid" panose="020B0604020202020204" charset="-78"/>
+                <a:cs typeface="Abar Mid" panose="020B0604020202020204" charset="-78"/>
+              </a:endParaRPr>
+            </a:p>
+          </p:txBody>
+        </p:sp>
+      </p:grpSp>
+      <p:sp>
+        <p:nvSpPr>
+          <p:cNvPr id="12" name="عنوان 1">
+            <a:extLst>
+              <a:ext uri="{FF2B5EF4-FFF2-40B4-BE49-F238E27FC236}">
+                <a16:creationId xmlns:a16="http://schemas.microsoft.com/office/drawing/2014/main" id="{06872828-6DE3-581A-89C4-CF5C17F180FB}"/>
+              </a:ext>
+            </a:extLst>
+          </p:cNvPr>
+          <p:cNvSpPr txBox="1">
+            <a:spLocks/>
+          </p:cNvSpPr>
+          <p:nvPr/>
+        </p:nvSpPr>
+        <p:spPr>
+          <a:xfrm>
+            <a:off x="2445100" y="281713"/>
+            <a:ext cx="14757400" cy="1295400"/>
+          </a:xfrm>
+          <a:prstGeom prst="rect">
+            <a:avLst/>
+          </a:prstGeom>
+        </p:spPr>
+        <p:txBody>
+          <a:bodyPr vert="horz" lIns="91440" tIns="45720" rIns="91440" bIns="45720" rtlCol="0" anchor="ctr">
+            <a:normAutofit/>
+          </a:bodyPr>
+          <a:lstStyle>
+            <a:lvl1pPr algn="ctr" defTabSz="914411" rtl="0" eaLnBrk="1" latinLnBrk="0" hangingPunct="1">
+              <a:spcBef>
+                <a:spcPct val="0"/>
+              </a:spcBef>
+              <a:buNone/>
+              <a:defRPr sz="4400" kern="1200">
+                <a:solidFill>
+                  <a:schemeClr val="tx1"/>
+                </a:solidFill>
+                <a:latin typeface="+mj-lt"/>
+                <a:ea typeface="+mj-ea"/>
+                <a:cs typeface="+mj-cs"/>
+              </a:defRPr>
+            </a:lvl1pPr>
+          </a:lstStyle>
+          <a:p>
+            <a:pPr marL="0" marR="0" lvl="0" indent="0" algn="r" defTabSz="914411" rtl="1" eaLnBrk="1" fontAlgn="auto" latinLnBrk="0" hangingPunct="1">
+              <a:lnSpc>
+                <a:spcPct val="100000"/>
+              </a:lnSpc>
+              <a:spcBef>
+                <a:spcPct val="0"/>
+              </a:spcBef>
+              <a:spcAft>
+                <a:spcPts val="0"/>
+              </a:spcAft>
+              <a:buClrTx/>
+              <a:buSzTx/>
+              <a:buFontTx/>
+              <a:buNone/>
+              <a:tabLst/>
+              <a:defRPr/>
+            </a:pPr>
+            <a:r>
+              <a:rPr kumimoji="0" lang="ar-SA" sz="4400" b="1" i="0" u="none" strike="noStrike" kern="1200" cap="none" spc="0" normalizeH="0" baseline="0" noProof="0" dirty="0">
+                <a:ln>
+                  <a:noFill/>
+                </a:ln>
+                <a:solidFill>
+                  <a:srgbClr val="D7A562"/>
+                </a:solidFill>
+                <a:effectLst/>
+                <a:uLnTx/>
+                <a:uFillTx/>
+                <a:latin typeface="Abar Mid" panose="020B0604020202020204" charset="-78"/>
+                <a:ea typeface="Abar Mid" panose="020B0604020202020204" charset="-78"/>
+                <a:cs typeface="Abar Mid" panose="020B0604020202020204" charset="-78"/>
+              </a:rPr>
+              <a:t>{{T}}</a:t>
+            </a:r>
+            <a:endParaRPr kumimoji="0" lang="ar-SA" sz="4200" b="1" i="0" u="none" strike="noStrike" kern="1200" cap="none" spc="0" normalizeH="0" baseline="0" noProof="0" dirty="0">
+              <a:ln>
+                <a:noFill/>
+              </a:ln>
+              <a:solidFill>
+                <a:srgbClr val="FAF6F3">
+                  <a:lumMod val="25000"/>
+                </a:srgbClr>
+              </a:solidFill>
+              <a:effectLst/>
+              <a:uLnTx/>
+              <a:uFillTx/>
+              <a:latin typeface="Abar Mid" panose="020B0604020202020204" charset="-78"/>
+              <a:ea typeface="Abar Mid" panose="020B0604020202020204" charset="-78"/>
+              <a:cs typeface="Abar Mid" panose="020B0604020202020204" charset="-78"/>
+            </a:endParaRPr>
+          </a:p>
+        </p:txBody>
+      </p:sp>
+      <p:sp>
+        <p:nvSpPr>
+          <p:cNvPr id="990" name="BODY"/>
+          <p:cNvSpPr/>
+          <p:nvPr/>
+        </p:nvSpPr>
+        <p:spPr>
+          <a:xfrm>
+            <a:off x="0" y="0"/>
+            <a:ext cx="1" cy="1"/>
+          </a:xfrm>
+          <a:prstGeom prst="rect">
+            <a:avLst/>
+          </a:prstGeom>
+        </p:spPr>
+      </p:sp>
+    </p:spTree>
+    <p:extLst>
+      <p:ext uri="{BB962C8B-B14F-4D97-AF65-F5344CB8AC3E}">
+        <p14:creationId xmlns:p14="http://schemas.microsoft.com/office/powerpoint/2010/main" val="1120479240"/>
+      </p:ext>
+    </p:extLst>
+  </p:cSld>
+  <p:clrMapOvr>
+    <a:masterClrMapping/>
+  </p:clrMapOvr>
+</p:sld>
+</file>
+
 <file path=ppt/theme/theme1.xml><?xml version="1.0" encoding="utf-8"?>
 <a:theme xmlns:a="http://schemas.openxmlformats.org/drawingml/2006/main" name="Office Theme">
   <a:themeElements>
